--- a/python/images/python_basic.pptx
+++ b/python/images/python_basic.pptx
@@ -266,7 +266,7 @@
           <a:p>
             <a:fld id="{191C4905-139F-4E14-8443-F80EB1AE3DD6}" type="datetimeFigureOut">
               <a:rPr lang="ko-KR" altLang="en-US" smtClean="0"/>
-              <a:t>2026-01-20</a:t>
+              <a:t>2026-07-21</a:t>
             </a:fld>
             <a:endParaRPr lang="ko-KR" altLang="en-US"/>
           </a:p>
@@ -464,7 +464,7 @@
           <a:p>
             <a:fld id="{191C4905-139F-4E14-8443-F80EB1AE3DD6}" type="datetimeFigureOut">
               <a:rPr lang="ko-KR" altLang="en-US" smtClean="0"/>
-              <a:t>2026-01-20</a:t>
+              <a:t>2026-07-21</a:t>
             </a:fld>
             <a:endParaRPr lang="ko-KR" altLang="en-US"/>
           </a:p>
@@ -672,7 +672,7 @@
           <a:p>
             <a:fld id="{191C4905-139F-4E14-8443-F80EB1AE3DD6}" type="datetimeFigureOut">
               <a:rPr lang="ko-KR" altLang="en-US" smtClean="0"/>
-              <a:t>2026-01-20</a:t>
+              <a:t>2026-07-21</a:t>
             </a:fld>
             <a:endParaRPr lang="ko-KR" altLang="en-US"/>
           </a:p>
@@ -870,7 +870,7 @@
           <a:p>
             <a:fld id="{191C4905-139F-4E14-8443-F80EB1AE3DD6}" type="datetimeFigureOut">
               <a:rPr lang="ko-KR" altLang="en-US" smtClean="0"/>
-              <a:t>2026-01-20</a:t>
+              <a:t>2026-07-21</a:t>
             </a:fld>
             <a:endParaRPr lang="ko-KR" altLang="en-US"/>
           </a:p>
@@ -1145,7 +1145,7 @@
           <a:p>
             <a:fld id="{191C4905-139F-4E14-8443-F80EB1AE3DD6}" type="datetimeFigureOut">
               <a:rPr lang="ko-KR" altLang="en-US" smtClean="0"/>
-              <a:t>2026-01-20</a:t>
+              <a:t>2026-07-21</a:t>
             </a:fld>
             <a:endParaRPr lang="ko-KR" altLang="en-US"/>
           </a:p>
@@ -1410,7 +1410,7 @@
           <a:p>
             <a:fld id="{191C4905-139F-4E14-8443-F80EB1AE3DD6}" type="datetimeFigureOut">
               <a:rPr lang="ko-KR" altLang="en-US" smtClean="0"/>
-              <a:t>2026-01-20</a:t>
+              <a:t>2026-07-21</a:t>
             </a:fld>
             <a:endParaRPr lang="ko-KR" altLang="en-US"/>
           </a:p>
@@ -1822,7 +1822,7 @@
           <a:p>
             <a:fld id="{191C4905-139F-4E14-8443-F80EB1AE3DD6}" type="datetimeFigureOut">
               <a:rPr lang="ko-KR" altLang="en-US" smtClean="0"/>
-              <a:t>2026-01-20</a:t>
+              <a:t>2026-07-21</a:t>
             </a:fld>
             <a:endParaRPr lang="ko-KR" altLang="en-US"/>
           </a:p>
@@ -1963,7 +1963,7 @@
           <a:p>
             <a:fld id="{191C4905-139F-4E14-8443-F80EB1AE3DD6}" type="datetimeFigureOut">
               <a:rPr lang="ko-KR" altLang="en-US" smtClean="0"/>
-              <a:t>2026-01-20</a:t>
+              <a:t>2026-07-21</a:t>
             </a:fld>
             <a:endParaRPr lang="ko-KR" altLang="en-US"/>
           </a:p>
@@ -2076,7 +2076,7 @@
           <a:p>
             <a:fld id="{191C4905-139F-4E14-8443-F80EB1AE3DD6}" type="datetimeFigureOut">
               <a:rPr lang="ko-KR" altLang="en-US" smtClean="0"/>
-              <a:t>2026-01-20</a:t>
+              <a:t>2026-07-21</a:t>
             </a:fld>
             <a:endParaRPr lang="ko-KR" altLang="en-US"/>
           </a:p>
@@ -2387,7 +2387,7 @@
           <a:p>
             <a:fld id="{191C4905-139F-4E14-8443-F80EB1AE3DD6}" type="datetimeFigureOut">
               <a:rPr lang="ko-KR" altLang="en-US" smtClean="0"/>
-              <a:t>2026-01-20</a:t>
+              <a:t>2026-07-21</a:t>
             </a:fld>
             <a:endParaRPr lang="ko-KR" altLang="en-US"/>
           </a:p>
@@ -2675,7 +2675,7 @@
           <a:p>
             <a:fld id="{191C4905-139F-4E14-8443-F80EB1AE3DD6}" type="datetimeFigureOut">
               <a:rPr lang="ko-KR" altLang="en-US" smtClean="0"/>
-              <a:t>2026-01-20</a:t>
+              <a:t>2026-07-21</a:t>
             </a:fld>
             <a:endParaRPr lang="ko-KR" altLang="en-US"/>
           </a:p>
@@ -2916,7 +2916,7 @@
           <a:p>
             <a:fld id="{191C4905-139F-4E14-8443-F80EB1AE3DD6}" type="datetimeFigureOut">
               <a:rPr lang="ko-KR" altLang="en-US" smtClean="0"/>
-              <a:t>2026-01-20</a:t>
+              <a:t>2026-07-21</a:t>
             </a:fld>
             <a:endParaRPr lang="ko-KR" altLang="en-US"/>
           </a:p>
@@ -5408,7 +5408,7 @@
           <p:nvPr>
             <p:extLst>
               <p:ext uri="{D42A27DB-BD31-4B8C-83A1-F6EECF244321}">
-                <p14:modId xmlns:p14="http://schemas.microsoft.com/office/powerpoint/2010/main" val="1872693949"/>
+                <p14:modId xmlns:p14="http://schemas.microsoft.com/office/powerpoint/2010/main" val="1963407246"/>
               </p:ext>
             </p:extLst>
           </p:nvPr>
@@ -8263,7 +8263,7 @@
           <p:nvPr>
             <p:extLst>
               <p:ext uri="{D42A27DB-BD31-4B8C-83A1-F6EECF244321}">
-                <p14:modId xmlns:p14="http://schemas.microsoft.com/office/powerpoint/2010/main" val="364203644"/>
+                <p14:modId xmlns:p14="http://schemas.microsoft.com/office/powerpoint/2010/main" val="2474604501"/>
               </p:ext>
             </p:extLst>
           </p:nvPr>
@@ -8882,7 +8882,7 @@
           <p:nvPr>
             <p:extLst>
               <p:ext uri="{D42A27DB-BD31-4B8C-83A1-F6EECF244321}">
-                <p14:modId xmlns:p14="http://schemas.microsoft.com/office/powerpoint/2010/main" val="3091794609"/>
+                <p14:modId xmlns:p14="http://schemas.microsoft.com/office/powerpoint/2010/main" val="637581872"/>
               </p:ext>
             </p:extLst>
           </p:nvPr>
@@ -9051,7 +9051,7 @@
           <p:nvPr>
             <p:extLst>
               <p:ext uri="{D42A27DB-BD31-4B8C-83A1-F6EECF244321}">
-                <p14:modId xmlns:p14="http://schemas.microsoft.com/office/powerpoint/2010/main" val="1821972778"/>
+                <p14:modId xmlns:p14="http://schemas.microsoft.com/office/powerpoint/2010/main" val="582259715"/>
               </p:ext>
             </p:extLst>
           </p:nvPr>
